--- a/RefineASR.pptx
+++ b/RefineASR.pptx
@@ -5,19 +5,21 @@
     <p:sldMasterId id="2147483648" r:id="rId1"/>
   </p:sldMasterIdLst>
   <p:sldIdLst>
-    <p:sldId id="257" r:id="rId2"/>
-    <p:sldId id="256" r:id="rId3"/>
-    <p:sldId id="264" r:id="rId4"/>
-    <p:sldId id="328" r:id="rId5"/>
-    <p:sldId id="351" r:id="rId6"/>
-    <p:sldId id="343" r:id="rId7"/>
-    <p:sldId id="331" r:id="rId8"/>
-    <p:sldId id="345" r:id="rId9"/>
-    <p:sldId id="491" r:id="rId10"/>
-    <p:sldId id="352" r:id="rId11"/>
-    <p:sldId id="363" r:id="rId12"/>
-    <p:sldId id="490" r:id="rId13"/>
-    <p:sldId id="263" r:id="rId14"/>
+    <p:sldId id="492" r:id="rId2"/>
+    <p:sldId id="493" r:id="rId3"/>
+    <p:sldId id="257" r:id="rId4"/>
+    <p:sldId id="256" r:id="rId5"/>
+    <p:sldId id="264" r:id="rId6"/>
+    <p:sldId id="328" r:id="rId7"/>
+    <p:sldId id="351" r:id="rId8"/>
+    <p:sldId id="343" r:id="rId9"/>
+    <p:sldId id="331" r:id="rId10"/>
+    <p:sldId id="345" r:id="rId11"/>
+    <p:sldId id="491" r:id="rId12"/>
+    <p:sldId id="352" r:id="rId13"/>
+    <p:sldId id="363" r:id="rId14"/>
+    <p:sldId id="490" r:id="rId15"/>
+    <p:sldId id="263" r:id="rId16"/>
   </p:sldIdLst>
   <p:sldSz cx="12192000" cy="6858000"/>
   <p:notesSz cx="6858000" cy="9144000"/>
@@ -273,7 +275,7 @@
           <a:p>
             <a:fld id="{C997428D-714A-E04A-B8C8-71B76DE45B18}" type="datetimeFigureOut">
               <a:rPr lang="en-CN" smtClean="0"/>
-              <a:t>2026/8/30</a:t>
+              <a:t>2026/10/21</a:t>
             </a:fld>
             <a:endParaRPr lang="en-CN"/>
           </a:p>
@@ -473,7 +475,7 @@
           <a:p>
             <a:fld id="{C997428D-714A-E04A-B8C8-71B76DE45B18}" type="datetimeFigureOut">
               <a:rPr lang="en-CN" smtClean="0"/>
-              <a:t>2026/8/30</a:t>
+              <a:t>2026/10/21</a:t>
             </a:fld>
             <a:endParaRPr lang="en-CN"/>
           </a:p>
@@ -683,7 +685,7 @@
           <a:p>
             <a:fld id="{C997428D-714A-E04A-B8C8-71B76DE45B18}" type="datetimeFigureOut">
               <a:rPr lang="en-CN" smtClean="0"/>
-              <a:t>2026/8/30</a:t>
+              <a:t>2026/10/21</a:t>
             </a:fld>
             <a:endParaRPr lang="en-CN"/>
           </a:p>
@@ -883,7 +885,7 @@
           <a:p>
             <a:fld id="{C997428D-714A-E04A-B8C8-71B76DE45B18}" type="datetimeFigureOut">
               <a:rPr lang="en-CN" smtClean="0"/>
-              <a:t>2026/8/30</a:t>
+              <a:t>2026/10/21</a:t>
             </a:fld>
             <a:endParaRPr lang="en-CN"/>
           </a:p>
@@ -1159,7 +1161,7 @@
           <a:p>
             <a:fld id="{C997428D-714A-E04A-B8C8-71B76DE45B18}" type="datetimeFigureOut">
               <a:rPr lang="en-CN" smtClean="0"/>
-              <a:t>2026/8/30</a:t>
+              <a:t>2026/10/21</a:t>
             </a:fld>
             <a:endParaRPr lang="en-CN"/>
           </a:p>
@@ -1427,7 +1429,7 @@
           <a:p>
             <a:fld id="{C997428D-714A-E04A-B8C8-71B76DE45B18}" type="datetimeFigureOut">
               <a:rPr lang="en-CN" smtClean="0"/>
-              <a:t>2026/8/30</a:t>
+              <a:t>2026/10/21</a:t>
             </a:fld>
             <a:endParaRPr lang="en-CN"/>
           </a:p>
@@ -1842,7 +1844,7 @@
           <a:p>
             <a:fld id="{C997428D-714A-E04A-B8C8-71B76DE45B18}" type="datetimeFigureOut">
               <a:rPr lang="en-CN" smtClean="0"/>
-              <a:t>2026/8/30</a:t>
+              <a:t>2026/10/21</a:t>
             </a:fld>
             <a:endParaRPr lang="en-CN"/>
           </a:p>
@@ -1984,7 +1986,7 @@
           <a:p>
             <a:fld id="{C997428D-714A-E04A-B8C8-71B76DE45B18}" type="datetimeFigureOut">
               <a:rPr lang="en-CN" smtClean="0"/>
-              <a:t>2026/8/30</a:t>
+              <a:t>2026/10/21</a:t>
             </a:fld>
             <a:endParaRPr lang="en-CN"/>
           </a:p>
@@ -2097,7 +2099,7 @@
           <a:p>
             <a:fld id="{C997428D-714A-E04A-B8C8-71B76DE45B18}" type="datetimeFigureOut">
               <a:rPr lang="en-CN" smtClean="0"/>
-              <a:t>2026/8/30</a:t>
+              <a:t>2026/10/21</a:t>
             </a:fld>
             <a:endParaRPr lang="en-CN"/>
           </a:p>
@@ -2410,7 +2412,7 @@
           <a:p>
             <a:fld id="{C997428D-714A-E04A-B8C8-71B76DE45B18}" type="datetimeFigureOut">
               <a:rPr lang="en-CN" smtClean="0"/>
-              <a:t>2026/8/30</a:t>
+              <a:t>2026/10/21</a:t>
             </a:fld>
             <a:endParaRPr lang="en-CN"/>
           </a:p>
@@ -2699,7 +2701,7 @@
           <a:p>
             <a:fld id="{C997428D-714A-E04A-B8C8-71B76DE45B18}" type="datetimeFigureOut">
               <a:rPr lang="en-CN" smtClean="0"/>
-              <a:t>2026/8/30</a:t>
+              <a:t>2026/10/21</a:t>
             </a:fld>
             <a:endParaRPr lang="en-CN"/>
           </a:p>
@@ -2942,7 +2944,7 @@
           <a:p>
             <a:fld id="{C997428D-714A-E04A-B8C8-71B76DE45B18}" type="datetimeFigureOut">
               <a:rPr lang="en-CN" smtClean="0"/>
-              <a:t>2026/8/30</a:t>
+              <a:t>2026/10/21</a:t>
             </a:fld>
             <a:endParaRPr lang="en-CN"/>
           </a:p>
@@ -3359,271 +3361,40 @@
           <a:chExt cx="0" cy="0"/>
         </a:xfrm>
       </p:grpSpPr>
-      <p:sp>
-        <p:nvSpPr>
-          <p:cNvPr id="2" name="Title 1">
-            <a:extLst>
-              <a:ext uri="{FF2B5EF4-FFF2-40B4-BE49-F238E27FC236}">
-                <a16:creationId xmlns:a16="http://schemas.microsoft.com/office/drawing/2014/main" id="{43316BD8-CAA6-D778-786E-DD481C833715}"/>
-              </a:ext>
-            </a:extLst>
-          </p:cNvPr>
-          <p:cNvSpPr>
-            <a:spLocks noGrp="1"/>
-          </p:cNvSpPr>
-          <p:nvPr>
-            <p:ph type="ctrTitle"/>
-          </p:nvPr>
-        </p:nvSpPr>
+      <p:pic>
+        <p:nvPicPr>
+          <p:cNvPr id="6" name="Picture 5">
+            <a:extLst>
+              <a:ext uri="{FF2B5EF4-FFF2-40B4-BE49-F238E27FC236}">
+                <a16:creationId xmlns:a16="http://schemas.microsoft.com/office/drawing/2014/main" id="{BC74FF8C-DAC7-FA36-E511-CE7D5E00DB13}"/>
+              </a:ext>
+            </a:extLst>
+          </p:cNvPr>
+          <p:cNvPicPr>
+            <a:picLocks noChangeAspect="1"/>
+          </p:cNvPicPr>
+          <p:nvPr/>
+        </p:nvPicPr>
+        <p:blipFill>
+          <a:blip r:embed="rId2"/>
+          <a:stretch>
+            <a:fillRect/>
+          </a:stretch>
+        </p:blipFill>
         <p:spPr>
           <a:xfrm>
-            <a:off x="1262743" y="697820"/>
-            <a:ext cx="9144000" cy="2387600"/>
-          </a:xfrm>
-        </p:spPr>
-        <p:txBody>
-          <a:bodyPr/>
-          <a:lstStyle/>
-          <a:p>
-            <a:r>
-              <a:rPr lang="en-CN" dirty="0"/>
-              <a:t>ASR</a:t>
-            </a:r>
-            <a:br>
-              <a:rPr lang="en-CN" dirty="0"/>
-            </a:br>
-            <a:endParaRPr lang="en-CN" dirty="0"/>
-          </a:p>
-        </p:txBody>
-      </p:sp>
-      <p:sp>
-        <p:nvSpPr>
-          <p:cNvPr id="3" name="TextBox 2">
-            <a:extLst>
-              <a:ext uri="{FF2B5EF4-FFF2-40B4-BE49-F238E27FC236}">
-                <a16:creationId xmlns:a16="http://schemas.microsoft.com/office/drawing/2014/main" id="{0ACE01E6-5B94-9D28-3CDD-870A65453C8B}"/>
-              </a:ext>
-            </a:extLst>
-          </p:cNvPr>
-          <p:cNvSpPr txBox="1"/>
-          <p:nvPr/>
-        </p:nvSpPr>
-        <p:spPr>
-          <a:xfrm>
-            <a:off x="4468586" y="2536371"/>
-            <a:ext cx="4691743" cy="3139321"/>
+            <a:off x="1697590" y="0"/>
+            <a:ext cx="7671097" cy="6698255"/>
           </a:xfrm>
           <a:prstGeom prst="rect">
             <a:avLst/>
           </a:prstGeom>
-          <a:noFill/>
         </p:spPr>
-        <p:txBody>
-          <a:bodyPr wrap="square" rtlCol="0">
-            <a:spAutoFit/>
-          </a:bodyPr>
-          <a:lstStyle/>
-          <a:p>
-            <a:pPr marL="342900" indent="-342900">
-              <a:buFont typeface="+mj-lt"/>
-              <a:buAutoNum type="arabicPeriod"/>
-            </a:pPr>
-            <a:r>
-              <a:rPr lang="en-US" dirty="0">
-                <a:effectLst/>
-                <a:latin typeface="Helvetica Neue" panose="02000503000000020004" pitchFamily="2" charset="0"/>
-              </a:rPr>
-              <a:t>Whisper 2022</a:t>
-            </a:r>
-          </a:p>
-          <a:p>
-            <a:pPr marL="342900" indent="-342900">
-              <a:buFont typeface="+mj-lt"/>
-              <a:buAutoNum type="arabicPeriod"/>
-            </a:pPr>
-            <a:r>
-              <a:rPr lang="en-US" dirty="0" err="1">
-                <a:effectLst/>
-                <a:latin typeface="Helvetica Neue" panose="02000503000000020004" pitchFamily="2" charset="0"/>
-              </a:rPr>
-              <a:t>SenseVoice</a:t>
-            </a:r>
-            <a:r>
-              <a:rPr lang="en-US" dirty="0">
-                <a:effectLst/>
-                <a:latin typeface="Helvetica Neue" panose="02000503000000020004" pitchFamily="2" charset="0"/>
-              </a:rPr>
-              <a:t> </a:t>
-            </a:r>
-            <a:r>
-              <a:rPr lang="en-US" dirty="0" err="1">
-                <a:effectLst/>
-                <a:latin typeface="Helvetica Neue" panose="02000503000000020004" pitchFamily="2" charset="0"/>
-              </a:rPr>
-              <a:t>Tongyi</a:t>
-            </a:r>
-            <a:r>
-              <a:rPr lang="en-US" dirty="0">
-                <a:effectLst/>
-                <a:latin typeface="Helvetica Neue" panose="02000503000000020004" pitchFamily="2" charset="0"/>
-              </a:rPr>
-              <a:t> 2024.7</a:t>
-            </a:r>
-          </a:p>
-          <a:p>
-            <a:pPr marL="342900" indent="-342900">
-              <a:buFont typeface="+mj-lt"/>
-              <a:buAutoNum type="arabicPeriod"/>
-            </a:pPr>
-            <a:r>
-              <a:rPr lang="en-US" dirty="0">
-                <a:effectLst/>
-                <a:latin typeface="Helvetica Neue" panose="02000503000000020004" pitchFamily="2" charset="0"/>
-              </a:rPr>
-              <a:t>Qwen2-Audio 7B 2024.7</a:t>
-            </a:r>
-          </a:p>
-          <a:p>
-            <a:pPr marL="342900" indent="-342900">
-              <a:buFont typeface="+mj-lt"/>
-              <a:buAutoNum type="arabicPeriod"/>
-            </a:pPr>
-            <a:r>
-              <a:rPr lang="en-US" dirty="0" err="1">
-                <a:effectLst/>
-                <a:latin typeface="Helvetica Neue" panose="02000503000000020004" pitchFamily="2" charset="0"/>
-              </a:rPr>
-              <a:t>VibeVoice</a:t>
-            </a:r>
-            <a:r>
-              <a:rPr lang="en-US" dirty="0">
-                <a:effectLst/>
-                <a:latin typeface="Helvetica Neue" panose="02000503000000020004" pitchFamily="2" charset="0"/>
-              </a:rPr>
-              <a:t> 7B </a:t>
-            </a:r>
-            <a:r>
-              <a:rPr lang="en-US" dirty="0" err="1">
-                <a:effectLst/>
-                <a:latin typeface="Helvetica Neue" panose="02000503000000020004" pitchFamily="2" charset="0"/>
-              </a:rPr>
-              <a:t>microsoft</a:t>
-            </a:r>
-            <a:r>
-              <a:rPr lang="en-US" dirty="0">
-                <a:effectLst/>
-                <a:latin typeface="Helvetica Neue" panose="02000503000000020004" pitchFamily="2" charset="0"/>
-              </a:rPr>
-              <a:t> 2025</a:t>
-            </a:r>
-          </a:p>
-          <a:p>
-            <a:pPr marL="342900" indent="-342900">
-              <a:buFont typeface="+mj-lt"/>
-              <a:buAutoNum type="arabicPeriod"/>
-            </a:pPr>
-            <a:r>
-              <a:rPr lang="en-US" dirty="0" err="1">
-                <a:effectLst/>
-                <a:latin typeface="Helvetica Neue" panose="02000503000000020004" pitchFamily="2" charset="0"/>
-              </a:rPr>
-              <a:t>VibeVoiceASR</a:t>
-            </a:r>
-            <a:r>
-              <a:rPr lang="en-US" dirty="0">
-                <a:effectLst/>
-                <a:latin typeface="Helvetica Neue" panose="02000503000000020004" pitchFamily="2" charset="0"/>
-              </a:rPr>
-              <a:t> 2026.3</a:t>
-            </a:r>
-          </a:p>
-          <a:p>
-            <a:pPr marL="342900" indent="-342900">
-              <a:buFont typeface="+mj-lt"/>
-              <a:buAutoNum type="arabicPeriod"/>
-            </a:pPr>
-            <a:r>
-              <a:rPr lang="en-US" dirty="0">
-                <a:effectLst/>
-                <a:latin typeface="Helvetica Neue" panose="02000503000000020004" pitchFamily="2" charset="0"/>
-              </a:rPr>
-              <a:t>Step-Audio 2025.8</a:t>
-            </a:r>
-          </a:p>
-          <a:p>
-            <a:pPr marL="342900" indent="-342900">
-              <a:buFont typeface="+mj-lt"/>
-              <a:buAutoNum type="arabicPeriod"/>
-            </a:pPr>
-            <a:r>
-              <a:rPr lang="en-US" dirty="0" err="1">
-                <a:effectLst/>
-                <a:latin typeface="Helvetica Neue" panose="02000503000000020004" pitchFamily="2" charset="0"/>
-              </a:rPr>
-              <a:t>Mimo</a:t>
-            </a:r>
-            <a:r>
-              <a:rPr lang="en-US" dirty="0">
-                <a:effectLst/>
-                <a:latin typeface="Helvetica Neue" panose="02000503000000020004" pitchFamily="2" charset="0"/>
-              </a:rPr>
-              <a:t>-Audio 7B. 2025.12 </a:t>
-            </a:r>
-          </a:p>
-          <a:p>
-            <a:pPr marL="342900" indent="-342900">
-              <a:buFont typeface="+mj-lt"/>
-              <a:buAutoNum type="arabicPeriod"/>
-            </a:pPr>
-            <a:r>
-              <a:rPr lang="en-US" dirty="0">
-                <a:effectLst/>
-                <a:latin typeface="Helvetica Neue" panose="02000503000000020004" pitchFamily="2" charset="0"/>
-              </a:rPr>
-              <a:t>Moss-Transcribe-Diarize  0.9B  2026.7</a:t>
-            </a:r>
-          </a:p>
-          <a:p>
-            <a:pPr marL="342900" indent="-342900">
-              <a:buFont typeface="+mj-lt"/>
-              <a:buAutoNum type="arabicPeriod"/>
-            </a:pPr>
-            <a:r>
-              <a:rPr lang="en-US" dirty="0">
-                <a:effectLst/>
-                <a:latin typeface="Helvetica Neue" panose="02000503000000020004" pitchFamily="2" charset="0"/>
-              </a:rPr>
-              <a:t>Cohere-transcribe-03-2026</a:t>
-            </a:r>
-          </a:p>
-          <a:p>
-            <a:pPr marL="342900" indent="-342900">
-              <a:buFont typeface="+mj-lt"/>
-              <a:buAutoNum type="arabicPeriod"/>
-            </a:pPr>
-            <a:r>
-              <a:rPr lang="en-US" dirty="0">
-                <a:latin typeface="Helvetica Neue" panose="02000503000000020004" pitchFamily="2" charset="0"/>
-              </a:rPr>
-              <a:t> </a:t>
-            </a:r>
-            <a:r>
-              <a:rPr lang="en-US" dirty="0">
-                <a:effectLst/>
-                <a:latin typeface="Helvetica Neue" panose="02000503000000020004" pitchFamily="2" charset="0"/>
-              </a:rPr>
-              <a:t>Qwen3-ASR-1.7B. 2026.1</a:t>
-            </a:r>
-          </a:p>
-          <a:p>
-            <a:endParaRPr lang="en-CN" dirty="0"/>
-          </a:p>
-        </p:txBody>
-      </p:sp>
+      </p:pic>
     </p:spTree>
     <p:extLst>
       <p:ext uri="{BB962C8B-B14F-4D97-AF65-F5344CB8AC3E}">
-        <p14:creationId xmlns:p14="http://schemas.microsoft.com/office/powerpoint/2010/main" val="2517341232"/>
+        <p14:creationId xmlns:p14="http://schemas.microsoft.com/office/powerpoint/2010/main" val="3131266860"/>
       </p:ext>
     </p:extLst>
   </p:cSld>
@@ -3650,12 +3421,76 @@
           <a:chExt cx="0" cy="0"/>
         </a:xfrm>
       </p:grpSpPr>
+      <p:sp>
+        <p:nvSpPr>
+          <p:cNvPr id="4" name="TextBox 3">
+            <a:extLst>
+              <a:ext uri="{FF2B5EF4-FFF2-40B4-BE49-F238E27FC236}">
+                <a16:creationId xmlns:a16="http://schemas.microsoft.com/office/drawing/2014/main" id="{980D641A-AF07-B686-FE9A-93EEC6B1BD1E}"/>
+              </a:ext>
+            </a:extLst>
+          </p:cNvPr>
+          <p:cNvSpPr txBox="1"/>
+          <p:nvPr/>
+        </p:nvSpPr>
+        <p:spPr>
+          <a:xfrm>
+            <a:off x="-95451" y="0"/>
+            <a:ext cx="7577919" cy="369332"/>
+          </a:xfrm>
+          <a:prstGeom prst="rect">
+            <a:avLst/>
+          </a:prstGeom>
+          <a:noFill/>
+        </p:spPr>
+        <p:txBody>
+          <a:bodyPr wrap="square">
+            <a:spAutoFit/>
+          </a:bodyPr>
+          <a:lstStyle/>
+          <a:p>
+            <a:r>
+              <a:rPr lang="en-US" b="0" i="0" dirty="0" err="1">
+                <a:effectLst/>
+                <a:highlight>
+                  <a:srgbClr val="FFFF00"/>
+                </a:highlight>
+                <a:latin typeface="system-ui"/>
+              </a:rPr>
+              <a:t>MiMo</a:t>
+            </a:r>
+            <a:r>
+              <a:rPr lang="en-US" b="0" i="0" dirty="0">
+                <a:effectLst/>
+                <a:highlight>
+                  <a:srgbClr val="FFFF00"/>
+                </a:highlight>
+                <a:latin typeface="system-ui"/>
+              </a:rPr>
+              <a:t>-Audio: Audio Language Models are Few-Shot Learners</a:t>
+            </a:r>
+            <a:r>
+              <a:rPr lang="en-US" dirty="0">
+                <a:highlight>
+                  <a:srgbClr val="FFFF00"/>
+                </a:highlight>
+              </a:rPr>
+              <a:t>-2025</a:t>
+            </a:r>
+            <a:endParaRPr lang="en-CN" dirty="0">
+              <a:highlight>
+                <a:srgbClr val="FFFF00"/>
+              </a:highlight>
+            </a:endParaRPr>
+          </a:p>
+        </p:txBody>
+      </p:sp>
       <p:pic>
         <p:nvPicPr>
           <p:cNvPr id="2" name="Picture 1">
             <a:extLst>
               <a:ext uri="{FF2B5EF4-FFF2-40B4-BE49-F238E27FC236}">
-                <a16:creationId xmlns:a16="http://schemas.microsoft.com/office/drawing/2014/main" id="{E1013FCA-E602-E157-6FCC-49082D86D844}"/>
+                <a16:creationId xmlns:a16="http://schemas.microsoft.com/office/drawing/2014/main" id="{C721DE66-8199-D40F-EBE9-040359BA8A13}"/>
               </a:ext>
             </a:extLst>
           </p:cNvPr>
@@ -3672,62 +3507,18 @@
         </p:blipFill>
         <p:spPr>
           <a:xfrm>
-            <a:off x="925657" y="775108"/>
-            <a:ext cx="9867034" cy="5307784"/>
+            <a:off x="1489926" y="685635"/>
+            <a:ext cx="10363820" cy="5486729"/>
           </a:xfrm>
           <a:prstGeom prst="rect">
             <a:avLst/>
           </a:prstGeom>
         </p:spPr>
       </p:pic>
-      <p:sp>
-        <p:nvSpPr>
-          <p:cNvPr id="5" name="TextBox 4">
-            <a:extLst>
-              <a:ext uri="{FF2B5EF4-FFF2-40B4-BE49-F238E27FC236}">
-                <a16:creationId xmlns:a16="http://schemas.microsoft.com/office/drawing/2014/main" id="{6685E32A-6E4F-FFA2-484C-20D62FF61AE6}"/>
-              </a:ext>
-            </a:extLst>
-          </p:cNvPr>
-          <p:cNvSpPr txBox="1"/>
-          <p:nvPr/>
-        </p:nvSpPr>
-        <p:spPr>
-          <a:xfrm>
-            <a:off x="110837" y="96767"/>
-            <a:ext cx="6096000" cy="369332"/>
-          </a:xfrm>
-          <a:prstGeom prst="rect">
-            <a:avLst/>
-          </a:prstGeom>
-          <a:noFill/>
-        </p:spPr>
-        <p:txBody>
-          <a:bodyPr wrap="square">
-            <a:spAutoFit/>
-          </a:bodyPr>
-          <a:lstStyle/>
-          <a:p>
-            <a:r>
-              <a:rPr lang="en-US" dirty="0">
-                <a:highlight>
-                  <a:srgbClr val="FFFF00"/>
-                </a:highlight>
-              </a:rPr>
-              <a:t>MOSS-Audio Technical Report</a:t>
-            </a:r>
-            <a:endParaRPr lang="en-CN" dirty="0">
-              <a:highlight>
-                <a:srgbClr val="FFFF00"/>
-              </a:highlight>
-            </a:endParaRPr>
-          </a:p>
-        </p:txBody>
-      </p:sp>
     </p:spTree>
     <p:extLst>
       <p:ext uri="{BB962C8B-B14F-4D97-AF65-F5344CB8AC3E}">
-        <p14:creationId xmlns:p14="http://schemas.microsoft.com/office/powerpoint/2010/main" val="2286683594"/>
+        <p14:creationId xmlns:p14="http://schemas.microsoft.com/office/powerpoint/2010/main" val="786678412"/>
       </p:ext>
     </p:extLst>
   </p:cSld>
@@ -3863,6 +3654,246 @@
     </p:spTree>
     <p:extLst>
       <p:ext uri="{BB962C8B-B14F-4D97-AF65-F5344CB8AC3E}">
+        <p14:creationId xmlns:p14="http://schemas.microsoft.com/office/powerpoint/2010/main" val="3761532237"/>
+      </p:ext>
+    </p:extLst>
+  </p:cSld>
+  <p:clrMapOvr>
+    <a:masterClrMapping/>
+  </p:clrMapOvr>
+</p:sld>
+</file>
+
+<file path=ppt/slides/slide12.xml><?xml version="1.0" encoding="utf-8"?>
+<p:sld xmlns:a="http://schemas.openxmlformats.org/drawingml/2006/main" xmlns:r="http://schemas.openxmlformats.org/officeDocument/2006/relationships" xmlns:p="http://schemas.openxmlformats.org/presentationml/2006/main">
+  <p:cSld>
+    <p:spTree>
+      <p:nvGrpSpPr>
+        <p:cNvPr id="1" name=""/>
+        <p:cNvGrpSpPr/>
+        <p:nvPr/>
+      </p:nvGrpSpPr>
+      <p:grpSpPr>
+        <a:xfrm>
+          <a:off x="0" y="0"/>
+          <a:ext cx="0" cy="0"/>
+          <a:chOff x="0" y="0"/>
+          <a:chExt cx="0" cy="0"/>
+        </a:xfrm>
+      </p:grpSpPr>
+      <p:pic>
+        <p:nvPicPr>
+          <p:cNvPr id="2" name="Picture 1">
+            <a:extLst>
+              <a:ext uri="{FF2B5EF4-FFF2-40B4-BE49-F238E27FC236}">
+                <a16:creationId xmlns:a16="http://schemas.microsoft.com/office/drawing/2014/main" id="{E1013FCA-E602-E157-6FCC-49082D86D844}"/>
+              </a:ext>
+            </a:extLst>
+          </p:cNvPr>
+          <p:cNvPicPr>
+            <a:picLocks noChangeAspect="1"/>
+          </p:cNvPicPr>
+          <p:nvPr/>
+        </p:nvPicPr>
+        <p:blipFill>
+          <a:blip r:embed="rId2"/>
+          <a:stretch>
+            <a:fillRect/>
+          </a:stretch>
+        </p:blipFill>
+        <p:spPr>
+          <a:xfrm>
+            <a:off x="925657" y="775108"/>
+            <a:ext cx="9867034" cy="5307784"/>
+          </a:xfrm>
+          <a:prstGeom prst="rect">
+            <a:avLst/>
+          </a:prstGeom>
+        </p:spPr>
+      </p:pic>
+      <p:sp>
+        <p:nvSpPr>
+          <p:cNvPr id="5" name="TextBox 4">
+            <a:extLst>
+              <a:ext uri="{FF2B5EF4-FFF2-40B4-BE49-F238E27FC236}">
+                <a16:creationId xmlns:a16="http://schemas.microsoft.com/office/drawing/2014/main" id="{6685E32A-6E4F-FFA2-484C-20D62FF61AE6}"/>
+              </a:ext>
+            </a:extLst>
+          </p:cNvPr>
+          <p:cNvSpPr txBox="1"/>
+          <p:nvPr/>
+        </p:nvSpPr>
+        <p:spPr>
+          <a:xfrm>
+            <a:off x="110837" y="96767"/>
+            <a:ext cx="6096000" cy="369332"/>
+          </a:xfrm>
+          <a:prstGeom prst="rect">
+            <a:avLst/>
+          </a:prstGeom>
+          <a:noFill/>
+        </p:spPr>
+        <p:txBody>
+          <a:bodyPr wrap="square">
+            <a:spAutoFit/>
+          </a:bodyPr>
+          <a:lstStyle/>
+          <a:p>
+            <a:r>
+              <a:rPr lang="en-US" dirty="0">
+                <a:highlight>
+                  <a:srgbClr val="FFFF00"/>
+                </a:highlight>
+              </a:rPr>
+              <a:t>MOSS-Audio Technical Report 2026.07</a:t>
+            </a:r>
+            <a:endParaRPr lang="en-CN" dirty="0">
+              <a:highlight>
+                <a:srgbClr val="FFFF00"/>
+              </a:highlight>
+            </a:endParaRPr>
+          </a:p>
+        </p:txBody>
+      </p:sp>
+    </p:spTree>
+    <p:extLst>
+      <p:ext uri="{BB962C8B-B14F-4D97-AF65-F5344CB8AC3E}">
+        <p14:creationId xmlns:p14="http://schemas.microsoft.com/office/powerpoint/2010/main" val="2286683594"/>
+      </p:ext>
+    </p:extLst>
+  </p:cSld>
+  <p:clrMapOvr>
+    <a:masterClrMapping/>
+  </p:clrMapOvr>
+</p:sld>
+</file>
+
+<file path=ppt/slides/slide13.xml><?xml version="1.0" encoding="utf-8"?>
+<p:sld xmlns:a="http://schemas.openxmlformats.org/drawingml/2006/main" xmlns:r="http://schemas.openxmlformats.org/officeDocument/2006/relationships" xmlns:p="http://schemas.openxmlformats.org/presentationml/2006/main">
+  <p:cSld>
+    <p:spTree>
+      <p:nvGrpSpPr>
+        <p:cNvPr id="1" name=""/>
+        <p:cNvGrpSpPr/>
+        <p:nvPr/>
+      </p:nvGrpSpPr>
+      <p:grpSpPr>
+        <a:xfrm>
+          <a:off x="0" y="0"/>
+          <a:ext cx="0" cy="0"/>
+          <a:chOff x="0" y="0"/>
+          <a:chExt cx="0" cy="0"/>
+        </a:xfrm>
+      </p:grpSpPr>
+      <p:pic>
+        <p:nvPicPr>
+          <p:cNvPr id="3" name="Picture 2">
+            <a:extLst>
+              <a:ext uri="{FF2B5EF4-FFF2-40B4-BE49-F238E27FC236}">
+                <a16:creationId xmlns:a16="http://schemas.microsoft.com/office/drawing/2014/main" id="{E5386C01-0386-EFBA-CB12-E79F7A449F2D}"/>
+              </a:ext>
+            </a:extLst>
+          </p:cNvPr>
+          <p:cNvPicPr>
+            <a:picLocks noChangeAspect="1"/>
+          </p:cNvPicPr>
+          <p:nvPr/>
+        </p:nvPicPr>
+        <p:blipFill>
+          <a:blip r:embed="rId2"/>
+          <a:stretch>
+            <a:fillRect/>
+          </a:stretch>
+        </p:blipFill>
+        <p:spPr>
+          <a:xfrm>
+            <a:off x="1982129" y="796536"/>
+            <a:ext cx="7942456" cy="4998610"/>
+          </a:xfrm>
+          <a:prstGeom prst="rect">
+            <a:avLst/>
+          </a:prstGeom>
+        </p:spPr>
+      </p:pic>
+      <p:sp>
+        <p:nvSpPr>
+          <p:cNvPr id="6" name="TextBox 5">
+            <a:extLst>
+              <a:ext uri="{FF2B5EF4-FFF2-40B4-BE49-F238E27FC236}">
+                <a16:creationId xmlns:a16="http://schemas.microsoft.com/office/drawing/2014/main" id="{3CEE1879-17B0-35B4-5A43-BD452660B9B3}"/>
+              </a:ext>
+            </a:extLst>
+          </p:cNvPr>
+          <p:cNvSpPr txBox="1"/>
+          <p:nvPr/>
+        </p:nvSpPr>
+        <p:spPr>
+          <a:xfrm>
+            <a:off x="0" y="88540"/>
+            <a:ext cx="6099716" cy="369332"/>
+          </a:xfrm>
+          <a:prstGeom prst="rect">
+            <a:avLst/>
+          </a:prstGeom>
+          <a:noFill/>
+        </p:spPr>
+        <p:txBody>
+          <a:bodyPr wrap="square">
+            <a:spAutoFit/>
+          </a:bodyPr>
+          <a:lstStyle/>
+          <a:p>
+            <a:r>
+              <a:rPr lang="en-US" dirty="0">
+                <a:highlight>
+                  <a:srgbClr val="FFFF00"/>
+                </a:highlight>
+              </a:rPr>
+              <a:t>Step-Audio 2 Technical Report</a:t>
+            </a:r>
+            <a:r>
+              <a:rPr lang="zh-CN" altLang="en-US" dirty="0">
+                <a:highlight>
+                  <a:srgbClr val="FFFF00"/>
+                </a:highlight>
+              </a:rPr>
+              <a:t>  </a:t>
+            </a:r>
+            <a:r>
+              <a:rPr lang="en-US" altLang="zh-CN" dirty="0">
+                <a:highlight>
+                  <a:srgbClr val="FFFF00"/>
+                </a:highlight>
+              </a:rPr>
+              <a:t>27</a:t>
+            </a:r>
+            <a:r>
+              <a:rPr lang="zh-CN" altLang="en-US" dirty="0">
+                <a:highlight>
+                  <a:srgbClr val="FFFF00"/>
+                </a:highlight>
+              </a:rPr>
+              <a:t> </a:t>
+            </a:r>
+            <a:r>
+              <a:rPr lang="en-US" altLang="zh-CN" dirty="0">
+                <a:highlight>
+                  <a:srgbClr val="FFFF00"/>
+                </a:highlight>
+              </a:rPr>
+              <a:t>Aug 2025</a:t>
+            </a:r>
+            <a:endParaRPr lang="en-CN" dirty="0">
+              <a:highlight>
+                <a:srgbClr val="FFFF00"/>
+              </a:highlight>
+            </a:endParaRPr>
+          </a:p>
+        </p:txBody>
+      </p:sp>
+    </p:spTree>
+    <p:extLst>
+      <p:ext uri="{BB962C8B-B14F-4D97-AF65-F5344CB8AC3E}">
         <p14:creationId xmlns:p14="http://schemas.microsoft.com/office/powerpoint/2010/main" val="1348296691"/>
       </p:ext>
     </p:extLst>
@@ -3873,7 +3904,7 @@
 </p:sld>
 </file>
 
-<file path=ppt/slides/slide12.xml><?xml version="1.0" encoding="utf-8"?>
+<file path=ppt/slides/slide14.xml><?xml version="1.0" encoding="utf-8"?>
 <p:sld xmlns:a="http://schemas.openxmlformats.org/drawingml/2006/main" xmlns:r="http://schemas.openxmlformats.org/officeDocument/2006/relationships" xmlns:p="http://schemas.openxmlformats.org/presentationml/2006/main">
   <p:cSld>
     <p:spTree>
@@ -3977,7 +4008,7 @@
 </p:sld>
 </file>
 
-<file path=ppt/slides/slide13.xml><?xml version="1.0" encoding="utf-8"?>
+<file path=ppt/slides/slide15.xml><?xml version="1.0" encoding="utf-8"?>
 <p:sld xmlns:a="http://schemas.openxmlformats.org/drawingml/2006/main" xmlns:r="http://schemas.openxmlformats.org/officeDocument/2006/relationships" xmlns:p="http://schemas.openxmlformats.org/presentationml/2006/main">
   <p:cSld>
     <p:spTree>
@@ -3994,6 +4025,72 @@
           <a:chExt cx="0" cy="0"/>
         </a:xfrm>
       </p:grpSpPr>
+      <p:pic>
+        <p:nvPicPr>
+          <p:cNvPr id="3" name="Picture 2">
+            <a:extLst>
+              <a:ext uri="{FF2B5EF4-FFF2-40B4-BE49-F238E27FC236}">
+                <a16:creationId xmlns:a16="http://schemas.microsoft.com/office/drawing/2014/main" id="{098DA656-65C6-AE82-A225-1EF3838C4BFC}"/>
+              </a:ext>
+            </a:extLst>
+          </p:cNvPr>
+          <p:cNvPicPr>
+            <a:picLocks noChangeAspect="1"/>
+          </p:cNvPicPr>
+          <p:nvPr/>
+        </p:nvPicPr>
+        <p:blipFill>
+          <a:blip r:embed="rId2"/>
+          <a:stretch>
+            <a:fillRect/>
+          </a:stretch>
+        </p:blipFill>
+        <p:spPr>
+          <a:xfrm>
+            <a:off x="2324673" y="461089"/>
+            <a:ext cx="7542653" cy="5935822"/>
+          </a:xfrm>
+          <a:prstGeom prst="rect">
+            <a:avLst/>
+          </a:prstGeom>
+        </p:spPr>
+      </p:pic>
+      <p:sp>
+        <p:nvSpPr>
+          <p:cNvPr id="5" name="TextBox 4">
+            <a:extLst>
+              <a:ext uri="{FF2B5EF4-FFF2-40B4-BE49-F238E27FC236}">
+                <a16:creationId xmlns:a16="http://schemas.microsoft.com/office/drawing/2014/main" id="{90197F5F-7540-FA89-8BA2-E554010C2434}"/>
+              </a:ext>
+            </a:extLst>
+          </p:cNvPr>
+          <p:cNvSpPr txBox="1"/>
+          <p:nvPr/>
+        </p:nvSpPr>
+        <p:spPr>
+          <a:xfrm>
+            <a:off x="-1837" y="91757"/>
+            <a:ext cx="6097836" cy="369332"/>
+          </a:xfrm>
+          <a:prstGeom prst="rect">
+            <a:avLst/>
+          </a:prstGeom>
+          <a:noFill/>
+        </p:spPr>
+        <p:txBody>
+          <a:bodyPr wrap="square">
+            <a:spAutoFit/>
+          </a:bodyPr>
+          <a:lstStyle/>
+          <a:p>
+            <a:r>
+              <a:rPr lang="en-US" dirty="0"/>
+              <a:t>Kimi-Audio Technical Report 2025.04</a:t>
+            </a:r>
+            <a:endParaRPr lang="en-CN" dirty="0"/>
+          </a:p>
+        </p:txBody>
+      </p:sp>
     </p:spTree>
     <p:extLst>
       <p:ext uri="{BB962C8B-B14F-4D97-AF65-F5344CB8AC3E}">
@@ -4008,6 +4105,437 @@
 </file>
 
 <file path=ppt/slides/slide2.xml><?xml version="1.0" encoding="utf-8"?>
+<p:sld xmlns:a="http://schemas.openxmlformats.org/drawingml/2006/main" xmlns:r="http://schemas.openxmlformats.org/officeDocument/2006/relationships" xmlns:p="http://schemas.openxmlformats.org/presentationml/2006/main">
+  <p:cSld>
+    <p:spTree>
+      <p:nvGrpSpPr>
+        <p:cNvPr id="1" name=""/>
+        <p:cNvGrpSpPr/>
+        <p:nvPr/>
+      </p:nvGrpSpPr>
+      <p:grpSpPr>
+        <a:xfrm>
+          <a:off x="0" y="0"/>
+          <a:ext cx="0" cy="0"/>
+          <a:chOff x="0" y="0"/>
+          <a:chExt cx="0" cy="0"/>
+        </a:xfrm>
+      </p:grpSpPr>
+      <p:sp>
+        <p:nvSpPr>
+          <p:cNvPr id="4" name="TextBox 3">
+            <a:extLst>
+              <a:ext uri="{FF2B5EF4-FFF2-40B4-BE49-F238E27FC236}">
+                <a16:creationId xmlns:a16="http://schemas.microsoft.com/office/drawing/2014/main" id="{E405795A-EFC8-AA34-EE62-7870A17CF485}"/>
+              </a:ext>
+            </a:extLst>
+          </p:cNvPr>
+          <p:cNvSpPr txBox="1"/>
+          <p:nvPr/>
+        </p:nvSpPr>
+        <p:spPr>
+          <a:xfrm>
+            <a:off x="382835" y="448804"/>
+            <a:ext cx="10711150" cy="2585323"/>
+          </a:xfrm>
+          <a:prstGeom prst="rect">
+            <a:avLst/>
+          </a:prstGeom>
+          <a:noFill/>
+        </p:spPr>
+        <p:txBody>
+          <a:bodyPr wrap="square">
+            <a:spAutoFit/>
+          </a:bodyPr>
+          <a:lstStyle/>
+          <a:p>
+            <a:r>
+              <a:rPr lang="en-US" altLang="zh-CN" dirty="0"/>
+              <a:t>1. HMM-GMM(Hidden Markov Model – Gaussian Mixture Model. 1980s-2000s)</a:t>
+            </a:r>
+          </a:p>
+          <a:p>
+            <a:r>
+              <a:rPr lang="en-US" altLang="zh-CN" dirty="0"/>
+              <a:t>2. DNN (DNN-HMM 2010-2014)</a:t>
+            </a:r>
+          </a:p>
+          <a:p>
+            <a:r>
+              <a:rPr lang="en-US" dirty="0"/>
+              <a:t>3. CTC 2006</a:t>
+            </a:r>
+          </a:p>
+          <a:p>
+            <a:r>
+              <a:rPr lang="en-US" dirty="0"/>
+              <a:t>4. RNN-T 2012 streaming neural ASR</a:t>
+            </a:r>
+          </a:p>
+          <a:p>
+            <a:r>
+              <a:rPr lang="en-US" dirty="0"/>
+              <a:t>5. LAS(Listen, Attend, and Spell): 2016</a:t>
+            </a:r>
+          </a:p>
+          <a:p>
+            <a:r>
+              <a:rPr lang="en-US" dirty="0"/>
+              <a:t>6. Transformer 2017</a:t>
+            </a:r>
+          </a:p>
+          <a:p>
+            <a:r>
+              <a:rPr lang="en-US" dirty="0"/>
+              <a:t>7. Conformer 2020 (Attention: models long-range relationships across speech frames.</a:t>
+            </a:r>
+          </a:p>
+          <a:p>
+            <a:r>
+              <a:rPr lang="en-US" dirty="0"/>
+              <a:t>                                   Convolution: captures local patterns such as short-term spectral and phonetic structure)</a:t>
+            </a:r>
+          </a:p>
+          <a:p>
+            <a:endParaRPr lang="en-CN" dirty="0"/>
+          </a:p>
+        </p:txBody>
+      </p:sp>
+    </p:spTree>
+    <p:extLst>
+      <p:ext uri="{BB962C8B-B14F-4D97-AF65-F5344CB8AC3E}">
+        <p14:creationId xmlns:p14="http://schemas.microsoft.com/office/powerpoint/2010/main" val="3249905926"/>
+      </p:ext>
+    </p:extLst>
+  </p:cSld>
+  <p:clrMapOvr>
+    <a:masterClrMapping/>
+  </p:clrMapOvr>
+</p:sld>
+</file>
+
+<file path=ppt/slides/slide3.xml><?xml version="1.0" encoding="utf-8"?>
+<p:sld xmlns:a="http://schemas.openxmlformats.org/drawingml/2006/main" xmlns:r="http://schemas.openxmlformats.org/officeDocument/2006/relationships" xmlns:p="http://schemas.openxmlformats.org/presentationml/2006/main">
+  <p:cSld>
+    <p:spTree>
+      <p:nvGrpSpPr>
+        <p:cNvPr id="1" name=""/>
+        <p:cNvGrpSpPr/>
+        <p:nvPr/>
+      </p:nvGrpSpPr>
+      <p:grpSpPr>
+        <a:xfrm>
+          <a:off x="0" y="0"/>
+          <a:ext cx="0" cy="0"/>
+          <a:chOff x="0" y="0"/>
+          <a:chExt cx="0" cy="0"/>
+        </a:xfrm>
+      </p:grpSpPr>
+      <p:sp>
+        <p:nvSpPr>
+          <p:cNvPr id="2" name="Title 1">
+            <a:extLst>
+              <a:ext uri="{FF2B5EF4-FFF2-40B4-BE49-F238E27FC236}">
+                <a16:creationId xmlns:a16="http://schemas.microsoft.com/office/drawing/2014/main" id="{43316BD8-CAA6-D778-786E-DD481C833715}"/>
+              </a:ext>
+            </a:extLst>
+          </p:cNvPr>
+          <p:cNvSpPr>
+            <a:spLocks noGrp="1"/>
+          </p:cNvSpPr>
+          <p:nvPr>
+            <p:ph type="ctrTitle"/>
+          </p:nvPr>
+        </p:nvSpPr>
+        <p:spPr>
+          <a:xfrm>
+            <a:off x="998339" y="0"/>
+            <a:ext cx="9144000" cy="2387600"/>
+          </a:xfrm>
+        </p:spPr>
+        <p:txBody>
+          <a:bodyPr/>
+          <a:lstStyle/>
+          <a:p>
+            <a:r>
+              <a:rPr lang="en-CN" dirty="0"/>
+              <a:t>ASR</a:t>
+            </a:r>
+            <a:br>
+              <a:rPr lang="en-CN" dirty="0"/>
+            </a:br>
+            <a:endParaRPr lang="en-CN" dirty="0"/>
+          </a:p>
+        </p:txBody>
+      </p:sp>
+      <p:sp>
+        <p:nvSpPr>
+          <p:cNvPr id="3" name="TextBox 2">
+            <a:extLst>
+              <a:ext uri="{FF2B5EF4-FFF2-40B4-BE49-F238E27FC236}">
+                <a16:creationId xmlns:a16="http://schemas.microsoft.com/office/drawing/2014/main" id="{0ACE01E6-5B94-9D28-3CDD-870A65453C8B}"/>
+              </a:ext>
+            </a:extLst>
+          </p:cNvPr>
+          <p:cNvSpPr txBox="1"/>
+          <p:nvPr/>
+        </p:nvSpPr>
+        <p:spPr>
+          <a:xfrm>
+            <a:off x="3510119" y="1566887"/>
+            <a:ext cx="4691743" cy="3416320"/>
+          </a:xfrm>
+          <a:prstGeom prst="rect">
+            <a:avLst/>
+          </a:prstGeom>
+          <a:noFill/>
+        </p:spPr>
+        <p:txBody>
+          <a:bodyPr wrap="square" rtlCol="0">
+            <a:spAutoFit/>
+          </a:bodyPr>
+          <a:lstStyle/>
+          <a:p>
+            <a:pPr marL="342900" indent="-342900">
+              <a:buFont typeface="+mj-lt"/>
+              <a:buAutoNum type="arabicPeriod"/>
+            </a:pPr>
+            <a:r>
+              <a:rPr lang="en-US" dirty="0">
+                <a:effectLst/>
+                <a:latin typeface="Helvetica Neue" panose="02000503000000020004" pitchFamily="2" charset="0"/>
+              </a:rPr>
+              <a:t>Whisper 2022</a:t>
+            </a:r>
+          </a:p>
+          <a:p>
+            <a:pPr marL="342900" indent="-342900">
+              <a:buFont typeface="+mj-lt"/>
+              <a:buAutoNum type="arabicPeriod"/>
+            </a:pPr>
+            <a:r>
+              <a:rPr lang="en-US" dirty="0" err="1">
+                <a:effectLst/>
+                <a:latin typeface="Helvetica Neue" panose="02000503000000020004" pitchFamily="2" charset="0"/>
+              </a:rPr>
+              <a:t>SenseVoice</a:t>
+            </a:r>
+            <a:r>
+              <a:rPr lang="en-US" dirty="0">
+                <a:effectLst/>
+                <a:latin typeface="Helvetica Neue" panose="02000503000000020004" pitchFamily="2" charset="0"/>
+              </a:rPr>
+              <a:t> </a:t>
+            </a:r>
+            <a:r>
+              <a:rPr lang="en-US" dirty="0" err="1">
+                <a:effectLst/>
+                <a:latin typeface="Helvetica Neue" panose="02000503000000020004" pitchFamily="2" charset="0"/>
+              </a:rPr>
+              <a:t>Tongyi</a:t>
+            </a:r>
+            <a:r>
+              <a:rPr lang="en-US" dirty="0">
+                <a:effectLst/>
+                <a:latin typeface="Helvetica Neue" panose="02000503000000020004" pitchFamily="2" charset="0"/>
+              </a:rPr>
+              <a:t> 2024.7</a:t>
+            </a:r>
+          </a:p>
+          <a:p>
+            <a:pPr marL="342900" indent="-342900">
+              <a:buFont typeface="+mj-lt"/>
+              <a:buAutoNum type="arabicPeriod"/>
+            </a:pPr>
+            <a:r>
+              <a:rPr lang="en-US" dirty="0">
+                <a:effectLst/>
+                <a:latin typeface="Helvetica Neue" panose="02000503000000020004" pitchFamily="2" charset="0"/>
+              </a:rPr>
+              <a:t>Qwen2-Audio 7B 2024.7</a:t>
+            </a:r>
+          </a:p>
+          <a:p>
+            <a:pPr marL="342900" indent="-342900">
+              <a:buFont typeface="+mj-lt"/>
+              <a:buAutoNum type="arabicPeriod"/>
+            </a:pPr>
+            <a:r>
+              <a:rPr lang="en-US" dirty="0" err="1">
+                <a:effectLst/>
+                <a:latin typeface="Helvetica Neue" panose="02000503000000020004" pitchFamily="2" charset="0"/>
+              </a:rPr>
+              <a:t>VibeVoice</a:t>
+            </a:r>
+            <a:r>
+              <a:rPr lang="en-US" dirty="0">
+                <a:effectLst/>
+                <a:latin typeface="Helvetica Neue" panose="02000503000000020004" pitchFamily="2" charset="0"/>
+              </a:rPr>
+              <a:t> 7B </a:t>
+            </a:r>
+            <a:r>
+              <a:rPr lang="en-US" dirty="0" err="1">
+                <a:effectLst/>
+                <a:latin typeface="Helvetica Neue" panose="02000503000000020004" pitchFamily="2" charset="0"/>
+              </a:rPr>
+              <a:t>microsoft</a:t>
+            </a:r>
+            <a:r>
+              <a:rPr lang="en-US" dirty="0">
+                <a:effectLst/>
+                <a:latin typeface="Helvetica Neue" panose="02000503000000020004" pitchFamily="2" charset="0"/>
+              </a:rPr>
+              <a:t> 2025</a:t>
+            </a:r>
+          </a:p>
+          <a:p>
+            <a:pPr marL="342900" indent="-342900">
+              <a:buFont typeface="+mj-lt"/>
+              <a:buAutoNum type="arabicPeriod"/>
+            </a:pPr>
+            <a:r>
+              <a:rPr lang="en-US" dirty="0" err="1">
+                <a:effectLst/>
+                <a:latin typeface="Helvetica Neue" panose="02000503000000020004" pitchFamily="2" charset="0"/>
+              </a:rPr>
+              <a:t>VibeVoiceASR</a:t>
+            </a:r>
+            <a:r>
+              <a:rPr lang="en-US" dirty="0">
+                <a:effectLst/>
+                <a:latin typeface="Helvetica Neue" panose="02000503000000020004" pitchFamily="2" charset="0"/>
+              </a:rPr>
+              <a:t> 2026.3</a:t>
+            </a:r>
+          </a:p>
+          <a:p>
+            <a:pPr marL="342900" indent="-342900">
+              <a:buFont typeface="+mj-lt"/>
+              <a:buAutoNum type="arabicPeriod"/>
+            </a:pPr>
+            <a:r>
+              <a:rPr lang="en-US" dirty="0">
+                <a:latin typeface="Helvetica Neue" panose="02000503000000020004" pitchFamily="2" charset="0"/>
+              </a:rPr>
+              <a:t>Kimi-Audio  2025.4</a:t>
+            </a:r>
+            <a:endParaRPr lang="en-US" dirty="0">
+              <a:effectLst/>
+              <a:latin typeface="Helvetica Neue" panose="02000503000000020004" pitchFamily="2" charset="0"/>
+            </a:endParaRPr>
+          </a:p>
+          <a:p>
+            <a:pPr marL="342900" indent="-342900">
+              <a:buFont typeface="+mj-lt"/>
+              <a:buAutoNum type="arabicPeriod"/>
+            </a:pPr>
+            <a:r>
+              <a:rPr lang="en-US" dirty="0">
+                <a:effectLst/>
+                <a:latin typeface="Helvetica Neue" panose="02000503000000020004" pitchFamily="2" charset="0"/>
+              </a:rPr>
+              <a:t>Step-Audio 2025.8</a:t>
+            </a:r>
+          </a:p>
+          <a:p>
+            <a:pPr marL="342900" indent="-342900">
+              <a:buFont typeface="+mj-lt"/>
+              <a:buAutoNum type="arabicPeriod"/>
+            </a:pPr>
+            <a:r>
+              <a:rPr lang="en-US" dirty="0" err="1">
+                <a:effectLst/>
+                <a:latin typeface="Helvetica Neue" panose="02000503000000020004" pitchFamily="2" charset="0"/>
+              </a:rPr>
+              <a:t>Mimo</a:t>
+            </a:r>
+            <a:r>
+              <a:rPr lang="en-US" dirty="0">
+                <a:effectLst/>
+                <a:latin typeface="Helvetica Neue" panose="02000503000000020004" pitchFamily="2" charset="0"/>
+              </a:rPr>
+              <a:t>-Audio 7B. 2025.12 </a:t>
+            </a:r>
+          </a:p>
+          <a:p>
+            <a:pPr marL="342900" indent="-342900">
+              <a:buFont typeface="+mj-lt"/>
+              <a:buAutoNum type="arabicPeriod"/>
+            </a:pPr>
+            <a:r>
+              <a:rPr lang="en-US" dirty="0">
+                <a:effectLst/>
+                <a:latin typeface="Helvetica Neue" panose="02000503000000020004" pitchFamily="2" charset="0"/>
+              </a:rPr>
+              <a:t>Moss-Transcribe-Diarize  0.9B  2026.7</a:t>
+            </a:r>
+          </a:p>
+          <a:p>
+            <a:pPr marL="342900" indent="-342900">
+              <a:buFont typeface="+mj-lt"/>
+              <a:buAutoNum type="arabicPeriod"/>
+            </a:pPr>
+            <a:r>
+              <a:rPr lang="en-US" dirty="0">
+                <a:effectLst/>
+                <a:latin typeface="Helvetica Neue" panose="02000503000000020004" pitchFamily="2" charset="0"/>
+              </a:rPr>
+              <a:t>Cohere-transcribe-03-2026</a:t>
+            </a:r>
+          </a:p>
+          <a:p>
+            <a:pPr marL="342900" indent="-342900">
+              <a:buFont typeface="+mj-lt"/>
+              <a:buAutoNum type="arabicPeriod"/>
+            </a:pPr>
+            <a:r>
+              <a:rPr lang="en-US">
+                <a:effectLst/>
+                <a:latin typeface="Helvetica Neue" panose="02000503000000020004" pitchFamily="2" charset="0"/>
+              </a:rPr>
+              <a:t>Qwen3-ASR-1.7B</a:t>
+            </a:r>
+            <a:r>
+              <a:rPr lang="en-US" dirty="0">
+                <a:latin typeface="Helvetica Neue" panose="02000503000000020004" pitchFamily="2" charset="0"/>
+              </a:rPr>
+              <a:t> </a:t>
+            </a:r>
+            <a:r>
+              <a:rPr lang="en-US">
+                <a:effectLst/>
+                <a:latin typeface="Helvetica Neue" panose="02000503000000020004" pitchFamily="2" charset="0"/>
+              </a:rPr>
+              <a:t> </a:t>
+            </a:r>
+            <a:r>
+              <a:rPr lang="en-US" dirty="0">
+                <a:effectLst/>
+                <a:latin typeface="Helvetica Neue" panose="02000503000000020004" pitchFamily="2" charset="0"/>
+              </a:rPr>
+              <a:t>2026.1</a:t>
+            </a:r>
+          </a:p>
+          <a:p>
+            <a:endParaRPr lang="en-CN" dirty="0"/>
+          </a:p>
+        </p:txBody>
+      </p:sp>
+    </p:spTree>
+    <p:extLst>
+      <p:ext uri="{BB962C8B-B14F-4D97-AF65-F5344CB8AC3E}">
+        <p14:creationId xmlns:p14="http://schemas.microsoft.com/office/powerpoint/2010/main" val="2517341232"/>
+      </p:ext>
+    </p:extLst>
+  </p:cSld>
+  <p:clrMapOvr>
+    <a:masterClrMapping/>
+  </p:clrMapOvr>
+</p:sld>
+</file>
+
+<file path=ppt/slides/slide4.xml><?xml version="1.0" encoding="utf-8"?>
 <p:sld xmlns:a="http://schemas.openxmlformats.org/drawingml/2006/main" xmlns:r="http://schemas.openxmlformats.org/officeDocument/2006/relationships" xmlns:p="http://schemas.openxmlformats.org/presentationml/2006/main">
   <p:cSld>
     <p:spTree>
@@ -5461,7 +5989,7 @@
 </p:sld>
 </file>
 
-<file path=ppt/slides/slide3.xml><?xml version="1.0" encoding="utf-8"?>
+<file path=ppt/slides/slide5.xml><?xml version="1.0" encoding="utf-8"?>
 <p:sld xmlns:a="http://schemas.openxmlformats.org/drawingml/2006/main" xmlns:r="http://schemas.openxmlformats.org/officeDocument/2006/relationships" xmlns:p="http://schemas.openxmlformats.org/presentationml/2006/main">
   <p:cSld>
     <p:spTree>
@@ -5582,7 +6110,7 @@
 </p:sld>
 </file>
 
-<file path=ppt/slides/slide4.xml><?xml version="1.0" encoding="utf-8"?>
+<file path=ppt/slides/slide6.xml><?xml version="1.0" encoding="utf-8"?>
 <p:sld xmlns:a="http://schemas.openxmlformats.org/drawingml/2006/main" xmlns:r="http://schemas.openxmlformats.org/officeDocument/2006/relationships" xmlns:p="http://schemas.openxmlformats.org/presentationml/2006/main">
   <p:cSld>
     <p:spTree>
@@ -5694,7 +6222,7 @@
 </p:sld>
 </file>
 
-<file path=ppt/slides/slide5.xml><?xml version="1.0" encoding="utf-8"?>
+<file path=ppt/slides/slide7.xml><?xml version="1.0" encoding="utf-8"?>
 <p:sld xmlns:a="http://schemas.openxmlformats.org/drawingml/2006/main" xmlns:r="http://schemas.openxmlformats.org/officeDocument/2006/relationships" xmlns:p="http://schemas.openxmlformats.org/presentationml/2006/main">
   <p:cSld>
     <p:spTree>
@@ -5872,7 +6400,7 @@
 </p:sld>
 </file>
 
-<file path=ppt/slides/slide6.xml><?xml version="1.0" encoding="utf-8"?>
+<file path=ppt/slides/slide8.xml><?xml version="1.0" encoding="utf-8"?>
 <p:sld xmlns:a="http://schemas.openxmlformats.org/drawingml/2006/main" xmlns:r="http://schemas.openxmlformats.org/officeDocument/2006/relationships" xmlns:p="http://schemas.openxmlformats.org/presentationml/2006/main">
   <p:cSld>
     <p:spTree>
@@ -5976,7 +6504,7 @@
 </p:sld>
 </file>
 
-<file path=ppt/slides/slide7.xml><?xml version="1.0" encoding="utf-8"?>
+<file path=ppt/slides/slide9.xml><?xml version="1.0" encoding="utf-8"?>
 <p:sld xmlns:a="http://schemas.openxmlformats.org/drawingml/2006/main" xmlns:r="http://schemas.openxmlformats.org/officeDocument/2006/relationships" xmlns:p="http://schemas.openxmlformats.org/presentationml/2006/main">
   <p:cSld>
     <p:spTree>
@@ -6071,266 +6599,6 @@
     <p:extLst>
       <p:ext uri="{BB962C8B-B14F-4D97-AF65-F5344CB8AC3E}">
         <p14:creationId xmlns:p14="http://schemas.microsoft.com/office/powerpoint/2010/main" val="603551763"/>
-      </p:ext>
-    </p:extLst>
-  </p:cSld>
-  <p:clrMapOvr>
-    <a:masterClrMapping/>
-  </p:clrMapOvr>
-</p:sld>
-</file>
-
-<file path=ppt/slides/slide8.xml><?xml version="1.0" encoding="utf-8"?>
-<p:sld xmlns:a="http://schemas.openxmlformats.org/drawingml/2006/main" xmlns:r="http://schemas.openxmlformats.org/officeDocument/2006/relationships" xmlns:p="http://schemas.openxmlformats.org/presentationml/2006/main">
-  <p:cSld>
-    <p:spTree>
-      <p:nvGrpSpPr>
-        <p:cNvPr id="1" name=""/>
-        <p:cNvGrpSpPr/>
-        <p:nvPr/>
-      </p:nvGrpSpPr>
-      <p:grpSpPr>
-        <a:xfrm>
-          <a:off x="0" y="0"/>
-          <a:ext cx="0" cy="0"/>
-          <a:chOff x="0" y="0"/>
-          <a:chExt cx="0" cy="0"/>
-        </a:xfrm>
-      </p:grpSpPr>
-      <p:sp>
-        <p:nvSpPr>
-          <p:cNvPr id="4" name="TextBox 3">
-            <a:extLst>
-              <a:ext uri="{FF2B5EF4-FFF2-40B4-BE49-F238E27FC236}">
-                <a16:creationId xmlns:a16="http://schemas.microsoft.com/office/drawing/2014/main" id="{980D641A-AF07-B686-FE9A-93EEC6B1BD1E}"/>
-              </a:ext>
-            </a:extLst>
-          </p:cNvPr>
-          <p:cNvSpPr txBox="1"/>
-          <p:nvPr/>
-        </p:nvSpPr>
-        <p:spPr>
-          <a:xfrm>
-            <a:off x="-95451" y="0"/>
-            <a:ext cx="7577919" cy="369332"/>
-          </a:xfrm>
-          <a:prstGeom prst="rect">
-            <a:avLst/>
-          </a:prstGeom>
-          <a:noFill/>
-        </p:spPr>
-        <p:txBody>
-          <a:bodyPr wrap="square">
-            <a:spAutoFit/>
-          </a:bodyPr>
-          <a:lstStyle/>
-          <a:p>
-            <a:r>
-              <a:rPr lang="en-US" b="0" i="0" dirty="0" err="1">
-                <a:effectLst/>
-                <a:highlight>
-                  <a:srgbClr val="FFFF00"/>
-                </a:highlight>
-                <a:latin typeface="system-ui"/>
-              </a:rPr>
-              <a:t>MiMo</a:t>
-            </a:r>
-            <a:r>
-              <a:rPr lang="en-US" b="0" i="0" dirty="0">
-                <a:effectLst/>
-                <a:highlight>
-                  <a:srgbClr val="FFFF00"/>
-                </a:highlight>
-                <a:latin typeface="system-ui"/>
-              </a:rPr>
-              <a:t>-Audio: Audio Language Models are Few-Shot Learners</a:t>
-            </a:r>
-            <a:r>
-              <a:rPr lang="en-US" dirty="0">
-                <a:highlight>
-                  <a:srgbClr val="FFFF00"/>
-                </a:highlight>
-              </a:rPr>
-              <a:t>-2025</a:t>
-            </a:r>
-            <a:endParaRPr lang="en-CN" dirty="0">
-              <a:highlight>
-                <a:srgbClr val="FFFF00"/>
-              </a:highlight>
-            </a:endParaRPr>
-          </a:p>
-        </p:txBody>
-      </p:sp>
-      <p:pic>
-        <p:nvPicPr>
-          <p:cNvPr id="2" name="Picture 1">
-            <a:extLst>
-              <a:ext uri="{FF2B5EF4-FFF2-40B4-BE49-F238E27FC236}">
-                <a16:creationId xmlns:a16="http://schemas.microsoft.com/office/drawing/2014/main" id="{C721DE66-8199-D40F-EBE9-040359BA8A13}"/>
-              </a:ext>
-            </a:extLst>
-          </p:cNvPr>
-          <p:cNvPicPr>
-            <a:picLocks noChangeAspect="1"/>
-          </p:cNvPicPr>
-          <p:nvPr/>
-        </p:nvPicPr>
-        <p:blipFill>
-          <a:blip r:embed="rId2"/>
-          <a:stretch>
-            <a:fillRect/>
-          </a:stretch>
-        </p:blipFill>
-        <p:spPr>
-          <a:xfrm>
-            <a:off x="1489926" y="685635"/>
-            <a:ext cx="10363820" cy="5486729"/>
-          </a:xfrm>
-          <a:prstGeom prst="rect">
-            <a:avLst/>
-          </a:prstGeom>
-        </p:spPr>
-      </p:pic>
-    </p:spTree>
-    <p:extLst>
-      <p:ext uri="{BB962C8B-B14F-4D97-AF65-F5344CB8AC3E}">
-        <p14:creationId xmlns:p14="http://schemas.microsoft.com/office/powerpoint/2010/main" val="786678412"/>
-      </p:ext>
-    </p:extLst>
-  </p:cSld>
-  <p:clrMapOvr>
-    <a:masterClrMapping/>
-  </p:clrMapOvr>
-</p:sld>
-</file>
-
-<file path=ppt/slides/slide9.xml><?xml version="1.0" encoding="utf-8"?>
-<p:sld xmlns:a="http://schemas.openxmlformats.org/drawingml/2006/main" xmlns:r="http://schemas.openxmlformats.org/officeDocument/2006/relationships" xmlns:p="http://schemas.openxmlformats.org/presentationml/2006/main">
-  <p:cSld>
-    <p:spTree>
-      <p:nvGrpSpPr>
-        <p:cNvPr id="1" name=""/>
-        <p:cNvGrpSpPr/>
-        <p:nvPr/>
-      </p:nvGrpSpPr>
-      <p:grpSpPr>
-        <a:xfrm>
-          <a:off x="0" y="0"/>
-          <a:ext cx="0" cy="0"/>
-          <a:chOff x="0" y="0"/>
-          <a:chExt cx="0" cy="0"/>
-        </a:xfrm>
-      </p:grpSpPr>
-      <p:pic>
-        <p:nvPicPr>
-          <p:cNvPr id="3" name="Picture 2">
-            <a:extLst>
-              <a:ext uri="{FF2B5EF4-FFF2-40B4-BE49-F238E27FC236}">
-                <a16:creationId xmlns:a16="http://schemas.microsoft.com/office/drawing/2014/main" id="{E5386C01-0386-EFBA-CB12-E79F7A449F2D}"/>
-              </a:ext>
-            </a:extLst>
-          </p:cNvPr>
-          <p:cNvPicPr>
-            <a:picLocks noChangeAspect="1"/>
-          </p:cNvPicPr>
-          <p:nvPr/>
-        </p:nvPicPr>
-        <p:blipFill>
-          <a:blip r:embed="rId2"/>
-          <a:stretch>
-            <a:fillRect/>
-          </a:stretch>
-        </p:blipFill>
-        <p:spPr>
-          <a:xfrm>
-            <a:off x="1982129" y="796536"/>
-            <a:ext cx="7942456" cy="4998610"/>
-          </a:xfrm>
-          <a:prstGeom prst="rect">
-            <a:avLst/>
-          </a:prstGeom>
-        </p:spPr>
-      </p:pic>
-      <p:sp>
-        <p:nvSpPr>
-          <p:cNvPr id="6" name="TextBox 5">
-            <a:extLst>
-              <a:ext uri="{FF2B5EF4-FFF2-40B4-BE49-F238E27FC236}">
-                <a16:creationId xmlns:a16="http://schemas.microsoft.com/office/drawing/2014/main" id="{3CEE1879-17B0-35B4-5A43-BD452660B9B3}"/>
-              </a:ext>
-            </a:extLst>
-          </p:cNvPr>
-          <p:cNvSpPr txBox="1"/>
-          <p:nvPr/>
-        </p:nvSpPr>
-        <p:spPr>
-          <a:xfrm>
-            <a:off x="0" y="88540"/>
-            <a:ext cx="6099716" cy="369332"/>
-          </a:xfrm>
-          <a:prstGeom prst="rect">
-            <a:avLst/>
-          </a:prstGeom>
-          <a:noFill/>
-        </p:spPr>
-        <p:txBody>
-          <a:bodyPr wrap="square">
-            <a:spAutoFit/>
-          </a:bodyPr>
-          <a:lstStyle/>
-          <a:p>
-            <a:r>
-              <a:rPr lang="en-US" dirty="0">
-                <a:highlight>
-                  <a:srgbClr val="FFFF00"/>
-                </a:highlight>
-              </a:rPr>
-              <a:t>Step-Audio 2 Technical Report</a:t>
-            </a:r>
-            <a:r>
-              <a:rPr lang="zh-CN" altLang="en-US" dirty="0">
-                <a:highlight>
-                  <a:srgbClr val="FFFF00"/>
-                </a:highlight>
-              </a:rPr>
-              <a:t>  </a:t>
-            </a:r>
-            <a:r>
-              <a:rPr lang="en-US" altLang="zh-CN" dirty="0">
-                <a:highlight>
-                  <a:srgbClr val="FFFF00"/>
-                </a:highlight>
-              </a:rPr>
-              <a:t>27</a:t>
-            </a:r>
-            <a:r>
-              <a:rPr lang="zh-CN" altLang="en-US" dirty="0">
-                <a:highlight>
-                  <a:srgbClr val="FFFF00"/>
-                </a:highlight>
-              </a:rPr>
-              <a:t> </a:t>
-            </a:r>
-            <a:r>
-              <a:rPr lang="en-US" altLang="zh-CN" dirty="0">
-                <a:highlight>
-                  <a:srgbClr val="FFFF00"/>
-                </a:highlight>
-              </a:rPr>
-              <a:t>Aug 2025</a:t>
-            </a:r>
-            <a:endParaRPr lang="en-CN" dirty="0">
-              <a:highlight>
-                <a:srgbClr val="FFFF00"/>
-              </a:highlight>
-            </a:endParaRPr>
-          </a:p>
-        </p:txBody>
-      </p:sp>
-    </p:spTree>
-    <p:extLst>
-      <p:ext uri="{BB962C8B-B14F-4D97-AF65-F5344CB8AC3E}">
-        <p14:creationId xmlns:p14="http://schemas.microsoft.com/office/powerpoint/2010/main" val="3761532237"/>
       </p:ext>
     </p:extLst>
   </p:cSld>
